--- a/statistics_02_binomial_distribution.pptx
+++ b/statistics_02_binomial_distribution.pptx
@@ -13282,8 +13282,8 @@
         </p:nvSpPr>
         <p:spPr>
           <a:xfrm>
-            <a:off x="201542" y="326957"/>
-            <a:ext cx="6415157" cy="2308324"/>
+            <a:off x="82039" y="83127"/>
+            <a:ext cx="4251253" cy="584775"/>
           </a:xfrm>
           <a:prstGeom prst="rect">
             <a:avLst/>
@@ -13335,60 +13335,6 @@
               <a:t>Binomial_distribution</a:t>
             </a:r>
             <a:endParaRPr lang="en-US" dirty="0"/>
-          </a:p>
-          <a:p>
-            <a:endParaRPr lang="en-US" dirty="0"/>
-          </a:p>
-          <a:p>
-            <a:r>
-              <a:rPr lang="en-US" dirty="0"/>
-              <a:t>The binomial distribution was discovered </a:t>
-            </a:r>
-          </a:p>
-          <a:p>
-            <a:r>
-              <a:rPr lang="en-US" dirty="0"/>
-              <a:t>by Jacob Bernoulli (1655 – 1705)</a:t>
-            </a:r>
-          </a:p>
-          <a:p>
-            <a:r>
-              <a:rPr lang="en-US" dirty="0"/>
-              <a:t>and published in 1713 (8 years after his death).</a:t>
-            </a:r>
-          </a:p>
-          <a:p>
-            <a:endParaRPr lang="en-US" dirty="0"/>
-          </a:p>
-          <a:p>
-            <a:r>
-              <a:rPr lang="en-US" dirty="0"/>
-              <a:t>We do </a:t>
-            </a:r>
-            <a:r>
-              <a:rPr lang="en-US" b="1" dirty="0">
-                <a:solidFill>
-                  <a:srgbClr val="0070C0"/>
-                </a:solidFill>
-              </a:rPr>
-              <a:t>n</a:t>
-            </a:r>
-            <a:r>
-              <a:rPr lang="en-US" dirty="0"/>
-              <a:t> independent trials with two possible outcomes</a:t>
-            </a:r>
-          </a:p>
-          <a:p>
-            <a:r>
-              <a:rPr lang="en-US" dirty="0"/>
-              <a:t>("yes" &amp; "no") with probabilities p  &amp;  q=(1-p).</a:t>
-            </a:r>
-          </a:p>
-          <a:p>
-            <a:r>
-              <a:rPr lang="en-US" dirty="0"/>
-              <a:t>Then the probability that x out of n trials have value "yes" is:</a:t>
-            </a:r>
           </a:p>
         </p:txBody>
       </p:sp>
@@ -13406,13 +13352,18 @@
         </p:nvSpPr>
         <p:spPr>
           <a:xfrm>
-            <a:off x="303250" y="4253496"/>
-            <a:ext cx="4940458" cy="2246769"/>
+            <a:off x="102758" y="4370032"/>
+            <a:ext cx="4940458" cy="738664"/>
           </a:xfrm>
           <a:prstGeom prst="rect">
             <a:avLst/>
           </a:prstGeom>
-          <a:noFill/>
+          <a:solidFill>
+            <a:schemeClr val="accent4">
+              <a:lumMod val="20000"/>
+              <a:lumOff val="80000"/>
+            </a:schemeClr>
+          </a:solidFill>
         </p:spPr>
         <p:txBody>
           <a:bodyPr wrap="square" rtlCol="0">
@@ -13444,83 +13395,6 @@
               <a:rPr lang="en-US" dirty="0"/>
               <a:t>    n! = n-factorial = n*(n-1)*(n-2) ... *1</a:t>
             </a:r>
-          </a:p>
-          <a:p>
-            <a:endParaRPr lang="en-US" dirty="0"/>
-          </a:p>
-          <a:p>
-            <a:r>
-              <a:rPr lang="en-US" b="1" dirty="0">
-                <a:solidFill>
-                  <a:srgbClr val="0070C0"/>
-                </a:solidFill>
-              </a:rPr>
-              <a:t>de </a:t>
-            </a:r>
-            <a:r>
-              <a:rPr lang="en-US" b="1" dirty="0" err="1">
-                <a:solidFill>
-                  <a:srgbClr val="0070C0"/>
-                </a:solidFill>
-              </a:rPr>
-              <a:t>Moivre</a:t>
-            </a:r>
-            <a:r>
-              <a:rPr lang="en-US" b="1" dirty="0">
-                <a:solidFill>
-                  <a:srgbClr val="0070C0"/>
-                </a:solidFill>
-              </a:rPr>
-              <a:t>–Laplace theorem</a:t>
-            </a:r>
-          </a:p>
-          <a:p>
-            <a:r>
-              <a:rPr lang="en-US" dirty="0"/>
-              <a:t>At large numbers the Binomial distribution may approach </a:t>
-            </a:r>
-          </a:p>
-          <a:p>
-            <a:r>
-              <a:rPr lang="en-US" dirty="0"/>
-              <a:t>Normal Gaussian curve with following parameters:</a:t>
-            </a:r>
-          </a:p>
-          <a:p>
-            <a:endParaRPr lang="en-US" dirty="0"/>
-          </a:p>
-          <a:p>
-            <a:r>
-              <a:rPr lang="en-US" b="1" dirty="0">
-                <a:solidFill>
-                  <a:srgbClr val="0070C0"/>
-                </a:solidFill>
-              </a:rPr>
-              <a:t>         Mean value = Expected value </a:t>
-            </a:r>
-            <a:r>
-              <a:rPr lang="en-US" dirty="0"/>
-              <a:t>E(x) = np</a:t>
-            </a:r>
-          </a:p>
-          <a:p>
-            <a:r>
-              <a:rPr lang="en-US" b="1" dirty="0">
-                <a:solidFill>
-                  <a:srgbClr val="0070C0"/>
-                </a:solidFill>
-              </a:rPr>
-              <a:t>         Variance</a:t>
-            </a:r>
-            <a:r>
-              <a:rPr lang="en-US" dirty="0"/>
-              <a:t> = </a:t>
-            </a:r>
-            <a:r>
-              <a:rPr lang="en-US" dirty="0" err="1"/>
-              <a:t>npq</a:t>
-            </a:r>
-            <a:endParaRPr lang="en-US" dirty="0"/>
           </a:p>
         </p:txBody>
       </p:sp>
@@ -13750,7 +13624,7 @@
         </p:nvSpPr>
         <p:spPr>
           <a:xfrm>
-            <a:off x="7521533" y="1736341"/>
+            <a:off x="7902104" y="3281173"/>
             <a:ext cx="1676692" cy="523220"/>
           </a:xfrm>
           <a:prstGeom prst="rect">
@@ -13812,7 +13686,7 @@
         </p:blipFill>
         <p:spPr>
           <a:xfrm>
-            <a:off x="7692261" y="188918"/>
+            <a:off x="8072832" y="1733750"/>
             <a:ext cx="1335237" cy="1517962"/>
           </a:xfrm>
           <a:prstGeom prst="rect">
@@ -13849,7 +13723,7 @@
         </p:blipFill>
         <p:spPr bwMode="auto">
           <a:xfrm>
-            <a:off x="5989158" y="3711043"/>
+            <a:off x="5550405" y="3852893"/>
             <a:ext cx="1918272" cy="1584322"/>
           </a:xfrm>
           <a:prstGeom prst="rect">
@@ -13910,6 +13784,300 @@
           <a:p>
             <a:pPr algn="ctr"/>
             <a:endParaRPr lang="en-US"/>
+          </a:p>
+        </p:txBody>
+      </p:sp>
+      <p:sp>
+        <p:nvSpPr>
+          <p:cNvPr id="8" name="TextBox 7">
+            <a:extLst>
+              <a:ext uri="{FF2B5EF4-FFF2-40B4-BE49-F238E27FC236}">
+                <a16:creationId xmlns:a16="http://schemas.microsoft.com/office/drawing/2014/main" id="{7BB8ECC0-6A1E-24AD-D528-1564C4E52D70}"/>
+              </a:ext>
+            </a:extLst>
+          </p:cNvPr>
+          <p:cNvSpPr txBox="1"/>
+          <p:nvPr/>
+        </p:nvSpPr>
+        <p:spPr>
+          <a:xfrm>
+            <a:off x="9027498" y="5974177"/>
+            <a:ext cx="3078087" cy="246221"/>
+          </a:xfrm>
+          <a:prstGeom prst="rect">
+            <a:avLst/>
+          </a:prstGeom>
+          <a:noFill/>
+        </p:spPr>
+        <p:txBody>
+          <a:bodyPr wrap="square" rtlCol="0">
+            <a:spAutoFit/>
+          </a:bodyPr>
+          <a:lstStyle/>
+          <a:p>
+            <a:pPr algn="ctr"/>
+            <a:r>
+              <a:rPr lang="en-US" sz="1000">
+                <a:hlinkClick r:id="rId8"/>
+              </a:rPr>
+              <a:t>https://www.youtube.com/shorts/Vo9Esp1yaC8</a:t>
+            </a:r>
+            <a:endParaRPr lang="en-US" sz="1000"/>
+          </a:p>
+        </p:txBody>
+      </p:sp>
+      <p:sp>
+        <p:nvSpPr>
+          <p:cNvPr id="14" name="TextBox 13">
+            <a:extLst>
+              <a:ext uri="{FF2B5EF4-FFF2-40B4-BE49-F238E27FC236}">
+                <a16:creationId xmlns:a16="http://schemas.microsoft.com/office/drawing/2014/main" id="{E52BC829-0FA8-18F6-C407-E493F89C0CD0}"/>
+              </a:ext>
+            </a:extLst>
+          </p:cNvPr>
+          <p:cNvSpPr txBox="1"/>
+          <p:nvPr/>
+        </p:nvSpPr>
+        <p:spPr>
+          <a:xfrm>
+            <a:off x="102449" y="1997951"/>
+            <a:ext cx="4898982" cy="738664"/>
+          </a:xfrm>
+          <a:prstGeom prst="rect">
+            <a:avLst/>
+          </a:prstGeom>
+          <a:solidFill>
+            <a:schemeClr val="accent4">
+              <a:lumMod val="20000"/>
+              <a:lumOff val="80000"/>
+            </a:schemeClr>
+          </a:solidFill>
+        </p:spPr>
+        <p:txBody>
+          <a:bodyPr wrap="square" rtlCol="0">
+            <a:spAutoFit/>
+          </a:bodyPr>
+          <a:lstStyle/>
+          <a:p>
+            <a:r>
+              <a:rPr lang="en-US" dirty="0"/>
+              <a:t>We do </a:t>
+            </a:r>
+            <a:r>
+              <a:rPr lang="en-US" b="1" dirty="0">
+                <a:solidFill>
+                  <a:srgbClr val="0070C0"/>
+                </a:solidFill>
+              </a:rPr>
+              <a:t>n</a:t>
+            </a:r>
+            <a:r>
+              <a:rPr lang="en-US" dirty="0"/>
+              <a:t> independent trials with two possible outcomes</a:t>
+            </a:r>
+          </a:p>
+          <a:p>
+            <a:r>
+              <a:rPr lang="en-US" dirty="0"/>
+              <a:t>("yes" &amp; "no") with probabilities p  &amp;  q=(1-p).</a:t>
+            </a:r>
+          </a:p>
+          <a:p>
+            <a:r>
+              <a:rPr lang="en-US" dirty="0"/>
+              <a:t>Then the probability that x out of n trials have value "yes" is:</a:t>
+            </a:r>
+          </a:p>
+        </p:txBody>
+      </p:sp>
+      <p:sp>
+        <p:nvSpPr>
+          <p:cNvPr id="15" name="TextBox 14">
+            <a:extLst>
+              <a:ext uri="{FF2B5EF4-FFF2-40B4-BE49-F238E27FC236}">
+                <a16:creationId xmlns:a16="http://schemas.microsoft.com/office/drawing/2014/main" id="{81FDE7AB-A7A0-37C3-F900-80E37C442CD6}"/>
+              </a:ext>
+            </a:extLst>
+          </p:cNvPr>
+          <p:cNvSpPr txBox="1"/>
+          <p:nvPr/>
+        </p:nvSpPr>
+        <p:spPr>
+          <a:xfrm>
+            <a:off x="102449" y="5295365"/>
+            <a:ext cx="4898982" cy="523220"/>
+          </a:xfrm>
+          <a:prstGeom prst="rect">
+            <a:avLst/>
+          </a:prstGeom>
+          <a:solidFill>
+            <a:schemeClr val="accent2">
+              <a:lumMod val="20000"/>
+              <a:lumOff val="80000"/>
+            </a:schemeClr>
+          </a:solidFill>
+        </p:spPr>
+        <p:txBody>
+          <a:bodyPr wrap="square" rtlCol="0">
+            <a:spAutoFit/>
+          </a:bodyPr>
+          <a:lstStyle/>
+          <a:p>
+            <a:r>
+              <a:rPr lang="en-US" b="1" dirty="0">
+                <a:solidFill>
+                  <a:srgbClr val="0070C0"/>
+                </a:solidFill>
+              </a:rPr>
+              <a:t>Mean value = Expected value </a:t>
+            </a:r>
+            <a:r>
+              <a:rPr lang="en-US" dirty="0"/>
+              <a:t>E(x) = np</a:t>
+            </a:r>
+          </a:p>
+          <a:p>
+            <a:r>
+              <a:rPr lang="en-US" b="1" dirty="0">
+                <a:solidFill>
+                  <a:srgbClr val="0070C0"/>
+                </a:solidFill>
+              </a:rPr>
+              <a:t>Variance</a:t>
+            </a:r>
+            <a:r>
+              <a:rPr lang="en-US" dirty="0"/>
+              <a:t> = </a:t>
+            </a:r>
+            <a:r>
+              <a:rPr lang="en-US" dirty="0" err="1"/>
+              <a:t>npq</a:t>
+            </a:r>
+            <a:endParaRPr lang="en-US" dirty="0"/>
+          </a:p>
+        </p:txBody>
+      </p:sp>
+      <p:sp>
+        <p:nvSpPr>
+          <p:cNvPr id="16" name="TextBox 15">
+            <a:extLst>
+              <a:ext uri="{FF2B5EF4-FFF2-40B4-BE49-F238E27FC236}">
+                <a16:creationId xmlns:a16="http://schemas.microsoft.com/office/drawing/2014/main" id="{692FD10E-8226-905F-FB08-84FC0BDA1190}"/>
+              </a:ext>
+            </a:extLst>
+          </p:cNvPr>
+          <p:cNvSpPr txBox="1"/>
+          <p:nvPr/>
+        </p:nvSpPr>
+        <p:spPr>
+          <a:xfrm>
+            <a:off x="82039" y="6034520"/>
+            <a:ext cx="4919392" cy="738664"/>
+          </a:xfrm>
+          <a:prstGeom prst="rect">
+            <a:avLst/>
+          </a:prstGeom>
+          <a:solidFill>
+            <a:schemeClr val="accent4">
+              <a:lumMod val="20000"/>
+              <a:lumOff val="80000"/>
+            </a:schemeClr>
+          </a:solidFill>
+        </p:spPr>
+        <p:txBody>
+          <a:bodyPr wrap="square" rtlCol="0">
+            <a:spAutoFit/>
+          </a:bodyPr>
+          <a:lstStyle/>
+          <a:p>
+            <a:r>
+              <a:rPr lang="en-US" b="1" dirty="0">
+                <a:solidFill>
+                  <a:srgbClr val="0070C0"/>
+                </a:solidFill>
+              </a:rPr>
+              <a:t>de </a:t>
+            </a:r>
+            <a:r>
+              <a:rPr lang="en-US" b="1" dirty="0" err="1">
+                <a:solidFill>
+                  <a:srgbClr val="0070C0"/>
+                </a:solidFill>
+              </a:rPr>
+              <a:t>Moivre</a:t>
+            </a:r>
+            <a:r>
+              <a:rPr lang="en-US" b="1" dirty="0">
+                <a:solidFill>
+                  <a:srgbClr val="0070C0"/>
+                </a:solidFill>
+              </a:rPr>
+              <a:t>–Laplace theorem</a:t>
+            </a:r>
+          </a:p>
+          <a:p>
+            <a:r>
+              <a:rPr lang="en-US" dirty="0"/>
+              <a:t>At large numbers the Binomial distribution may approach </a:t>
+            </a:r>
+          </a:p>
+          <a:p>
+            <a:r>
+              <a:rPr lang="en-US" dirty="0"/>
+              <a:t>Normal Gaussian curve with following parameters:</a:t>
+            </a:r>
+          </a:p>
+        </p:txBody>
+      </p:sp>
+      <p:sp>
+        <p:nvSpPr>
+          <p:cNvPr id="17" name="TextBox 16">
+            <a:extLst>
+              <a:ext uri="{FF2B5EF4-FFF2-40B4-BE49-F238E27FC236}">
+                <a16:creationId xmlns:a16="http://schemas.microsoft.com/office/drawing/2014/main" id="{B4F26747-6FEE-AD12-0B77-5B84882DDBFA}"/>
+              </a:ext>
+            </a:extLst>
+          </p:cNvPr>
+          <p:cNvSpPr txBox="1"/>
+          <p:nvPr/>
+        </p:nvSpPr>
+        <p:spPr>
+          <a:xfrm>
+            <a:off x="82039" y="995086"/>
+            <a:ext cx="4898981" cy="738664"/>
+          </a:xfrm>
+          <a:prstGeom prst="rect">
+            <a:avLst/>
+          </a:prstGeom>
+          <a:solidFill>
+            <a:schemeClr val="accent4">
+              <a:lumMod val="20000"/>
+              <a:lumOff val="80000"/>
+            </a:schemeClr>
+          </a:solidFill>
+        </p:spPr>
+        <p:txBody>
+          <a:bodyPr wrap="square" rtlCol="0">
+            <a:spAutoFit/>
+          </a:bodyPr>
+          <a:lstStyle/>
+          <a:p>
+            <a:r>
+              <a:rPr lang="en-US" dirty="0"/>
+              <a:t>The binomial distribution was discovered </a:t>
+            </a:r>
+          </a:p>
+          <a:p>
+            <a:r>
+              <a:rPr lang="en-US" dirty="0"/>
+              <a:t>by Jacob Bernoulli (1655 – 1705)</a:t>
+            </a:r>
+          </a:p>
+          <a:p>
+            <a:r>
+              <a:rPr lang="en-US" dirty="0"/>
+              <a:t>and published in 1713 (8 years after his death).</a:t>
+            </a:r>
           </a:p>
         </p:txBody>
       </p:sp>
@@ -17034,8 +17202,8 @@
         </p:nvSpPr>
         <p:spPr>
           <a:xfrm>
-            <a:off x="1" y="3897364"/>
-            <a:ext cx="4108174" cy="600164"/>
+            <a:off x="81889" y="3783998"/>
+            <a:ext cx="4872252" cy="738664"/>
           </a:xfrm>
           <a:prstGeom prst="rect">
             <a:avLst/>
@@ -17049,30 +17217,36 @@
           <a:lstStyle/>
           <a:p>
             <a:r>
-              <a:rPr lang="en-US" sz="1100" dirty="0">
+              <a:rPr lang="en-US" dirty="0">
                 <a:solidFill>
                   <a:srgbClr val="0070C0"/>
                 </a:solidFill>
+                <a:latin typeface="Calibri" panose="020F0502020204030204" pitchFamily="34" charset="0"/>
+                <a:cs typeface="Calibri" panose="020F0502020204030204" pitchFamily="34" charset="0"/>
               </a:rPr>
               <a:t>Coin flipping leads to binomial distribution, </a:t>
             </a:r>
           </a:p>
           <a:p>
             <a:r>
-              <a:rPr lang="en-US" sz="1100" dirty="0">
+              <a:rPr lang="en-US" dirty="0">
                 <a:solidFill>
                   <a:srgbClr val="0070C0"/>
                 </a:solidFill>
+                <a:latin typeface="Calibri" panose="020F0502020204030204" pitchFamily="34" charset="0"/>
+                <a:cs typeface="Calibri" panose="020F0502020204030204" pitchFamily="34" charset="0"/>
               </a:rPr>
               <a:t>which can be approximated with normal Gaussian distribution.</a:t>
             </a:r>
           </a:p>
           <a:p>
             <a:r>
-              <a:rPr lang="en-US" sz="1100" dirty="0">
+              <a:rPr lang="en-US" dirty="0">
                 <a:solidFill>
                   <a:srgbClr val="0070C0"/>
                 </a:solidFill>
+                <a:latin typeface="Calibri" panose="020F0502020204030204" pitchFamily="34" charset="0"/>
+                <a:cs typeface="Calibri" panose="020F0502020204030204" pitchFamily="34" charset="0"/>
               </a:rPr>
               <a:t>Here are confidence levels for Z (standard normal distribution):</a:t>
             </a:r>
@@ -17465,7 +17639,7 @@
         </p:blipFill>
         <p:spPr>
           <a:xfrm>
-            <a:off x="3956992" y="4563788"/>
+            <a:off x="3874282" y="4857584"/>
             <a:ext cx="2437946" cy="1604169"/>
           </a:xfrm>
           <a:prstGeom prst="rect">

--- a/statistics_02_binomial_distribution.pptx
+++ b/statistics_02_binomial_distribution.pptx
@@ -13624,7 +13624,7 @@
         </p:nvSpPr>
         <p:spPr>
           <a:xfrm>
-            <a:off x="7902104" y="3281173"/>
+            <a:off x="7665408" y="1718357"/>
             <a:ext cx="1676692" cy="523220"/>
           </a:xfrm>
           <a:prstGeom prst="rect">
@@ -13686,7 +13686,7 @@
         </p:blipFill>
         <p:spPr>
           <a:xfrm>
-            <a:off x="8072832" y="1733750"/>
+            <a:off x="7836136" y="170934"/>
             <a:ext cx="1335237" cy="1517962"/>
           </a:xfrm>
           <a:prstGeom prst="rect">
@@ -13723,7 +13723,7 @@
         </p:blipFill>
         <p:spPr bwMode="auto">
           <a:xfrm>
-            <a:off x="5550405" y="3852893"/>
+            <a:off x="5475760" y="4512965"/>
             <a:ext cx="1918272" cy="1584322"/>
           </a:xfrm>
           <a:prstGeom prst="rect">
@@ -13754,8 +13754,8 @@
           <p:nvPr/>
         </p:nvSpPr>
         <p:spPr>
-          <a:xfrm>
-            <a:off x="5243707" y="4584356"/>
+          <a:xfrm rot="1135959">
+            <a:off x="5169061" y="4946471"/>
             <a:ext cx="613396" cy="121396"/>
           </a:xfrm>
           <a:prstGeom prst="rightArrow">
@@ -14081,6 +14081,42 @@
           </a:p>
         </p:txBody>
       </p:sp>
+      <p:pic>
+        <p:nvPicPr>
+          <p:cNvPr id="18" name="Picture 17">
+            <a:extLst>
+              <a:ext uri="{FF2B5EF4-FFF2-40B4-BE49-F238E27FC236}">
+                <a16:creationId xmlns:a16="http://schemas.microsoft.com/office/drawing/2014/main" id="{9BE88EFF-117A-46E3-95AF-1DC96004CD74}"/>
+              </a:ext>
+            </a:extLst>
+          </p:cNvPr>
+          <p:cNvPicPr>
+            <a:picLocks noChangeAspect="1"/>
+          </p:cNvPicPr>
+          <p:nvPr/>
+        </p:nvPicPr>
+        <p:blipFill>
+          <a:blip r:embed="rId9" cstate="email">
+            <a:extLst>
+              <a:ext uri="{28A0092B-C50C-407E-A947-70E740481C1C}">
+                <a14:useLocalDpi xmlns:a14="http://schemas.microsoft.com/office/drawing/2010/main"/>
+              </a:ext>
+            </a:extLst>
+          </a:blip>
+          <a:stretch>
+            <a:fillRect/>
+          </a:stretch>
+        </p:blipFill>
+        <p:spPr>
+          <a:xfrm>
+            <a:off x="7157675" y="2324194"/>
+            <a:ext cx="2085478" cy="2292229"/>
+          </a:xfrm>
+          <a:prstGeom prst="rect">
+            <a:avLst/>
+          </a:prstGeom>
+        </p:spPr>
+      </p:pic>
     </p:spTree>
     <p:extLst>
       <p:ext uri="{BB962C8B-B14F-4D97-AF65-F5344CB8AC3E}">
